--- a/instructors/L4-carbon-awareness.pptx
+++ b/instructors/L4-carbon-awareness.pptx
@@ -140,7 +140,7 @@
 <file path=ppt/revisionInfo.xml><?xml version="1.0" encoding="utf-8"?>
 <p1510:revInfo xmlns:a="http://schemas.openxmlformats.org/drawingml/2006/main" xmlns:r="http://schemas.openxmlformats.org/officeDocument/2006/relationships" xmlns:p1510="http://schemas.microsoft.com/office/powerpoint/2015/10/main">
   <p1510:revLst>
-    <p1510:client id="{00510263-4C69-0E46-B108-BF94E9A56584}" v="5" dt="2025-10-07T13:39:55.726"/>
+    <p1510:client id="{DD38AF40-04A7-B645-B934-F524AAD4F891}" v="1" dt="2026-10-01T12:38:36.205"/>
   </p1510:revLst>
 </p1510:revInfo>
 </file>
@@ -149,174 +149,80 @@
 <pc:chgInfo xmlns:a="http://schemas.openxmlformats.org/drawingml/2006/main" xmlns:r="http://schemas.openxmlformats.org/officeDocument/2006/relationships" xmlns:ac="http://schemas.microsoft.com/office/drawing/2013/main/command" xmlns:pc="http://schemas.microsoft.com/office/powerpoint/2013/main/command">
   <pc:docChgLst>
     <pc:chgData name="Andrew Turner" userId="9b60647a-c825-4266-aafa-670849c64782" providerId="ADAL" clId="{292526B5-234E-5EAA-AFB8-0412B8CA4453}"/>
-    <pc:docChg chg="custSel addSld modSld modMainMaster">
-      <pc:chgData name="Andrew Turner" userId="9b60647a-c825-4266-aafa-670849c64782" providerId="ADAL" clId="{292526B5-234E-5EAA-AFB8-0412B8CA4453}" dt="2025-10-07T13:39:58.842" v="31" actId="20577"/>
+    <pc:docChg chg="undo custSel addSld modSld modMainMaster">
+      <pc:chgData name="Andrew Turner" userId="9b60647a-c825-4266-aafa-670849c64782" providerId="ADAL" clId="{292526B5-234E-5EAA-AFB8-0412B8CA4453}" dt="2026-10-02T05:58:37.825" v="340" actId="1076"/>
       <pc:docMkLst>
         <pc:docMk/>
       </pc:docMkLst>
-      <pc:sldChg chg="setBg">
-        <pc:chgData name="Andrew Turner" userId="9b60647a-c825-4266-aafa-670849c64782" providerId="ADAL" clId="{292526B5-234E-5EAA-AFB8-0412B8CA4453}" dt="2025-10-07T13:29:39.200" v="1"/>
+      <pc:sldChg chg="addSp modSp mod">
+        <pc:chgData name="Andrew Turner" userId="9b60647a-c825-4266-aafa-670849c64782" providerId="ADAL" clId="{292526B5-234E-5EAA-AFB8-0412B8CA4453}" dt="2026-10-02T05:58:37.825" v="340" actId="1076"/>
         <pc:sldMkLst>
           <pc:docMk/>
-          <pc:sldMk cId="2414141292" sldId="256"/>
+          <pc:sldMk cId="1917528225" sldId="261"/>
         </pc:sldMkLst>
+        <pc:spChg chg="mod">
+          <ac:chgData name="Andrew Turner" userId="9b60647a-c825-4266-aafa-670849c64782" providerId="ADAL" clId="{292526B5-234E-5EAA-AFB8-0412B8CA4453}" dt="2026-10-02T05:58:34.176" v="339" actId="1076"/>
+          <ac:spMkLst>
+            <pc:docMk/>
+            <pc:sldMk cId="1917528225" sldId="261"/>
+            <ac:spMk id="7" creationId="{27635A81-CDF8-4B88-9E38-767721C63D79}"/>
+          </ac:spMkLst>
+        </pc:spChg>
+        <pc:graphicFrameChg chg="mod modGraphic">
+          <ac:chgData name="Andrew Turner" userId="9b60647a-c825-4266-aafa-670849c64782" providerId="ADAL" clId="{292526B5-234E-5EAA-AFB8-0412B8CA4453}" dt="2026-10-02T05:58:31.208" v="338" actId="1076"/>
+          <ac:graphicFrameMkLst>
+            <pc:docMk/>
+            <pc:sldMk cId="1917528225" sldId="261"/>
+            <ac:graphicFrameMk id="4" creationId="{423E505C-9796-421E-8649-E3C72B607CA4}"/>
+          </ac:graphicFrameMkLst>
+        </pc:graphicFrameChg>
+        <pc:picChg chg="add mod modCrop">
+          <ac:chgData name="Andrew Turner" userId="9b60647a-c825-4266-aafa-670849c64782" providerId="ADAL" clId="{292526B5-234E-5EAA-AFB8-0412B8CA4453}" dt="2026-10-02T05:58:37.825" v="340" actId="1076"/>
+          <ac:picMkLst>
+            <pc:docMk/>
+            <pc:sldMk cId="1917528225" sldId="261"/>
+            <ac:picMk id="6" creationId="{A35B8E94-18B7-DFEF-3068-6C2E2B0229DD}"/>
+          </ac:picMkLst>
+        </pc:picChg>
       </pc:sldChg>
       <pc:sldChg chg="modSp mod">
-        <pc:chgData name="Andrew Turner" userId="9b60647a-c825-4266-aafa-670849c64782" providerId="ADAL" clId="{292526B5-234E-5EAA-AFB8-0412B8CA4453}" dt="2025-10-07T13:39:58.842" v="31" actId="20577"/>
+        <pc:chgData name="Andrew Turner" userId="9b60647a-c825-4266-aafa-670849c64782" providerId="ADAL" clId="{292526B5-234E-5EAA-AFB8-0412B8CA4453}" dt="2026-10-01T12:42:01.713" v="118" actId="1076"/>
         <pc:sldMkLst>
           <pc:docMk/>
-          <pc:sldMk cId="1181395689" sldId="258"/>
+          <pc:sldMk cId="2395960425" sldId="262"/>
         </pc:sldMkLst>
         <pc:spChg chg="mod">
-          <ac:chgData name="Andrew Turner" userId="9b60647a-c825-4266-aafa-670849c64782" providerId="ADAL" clId="{292526B5-234E-5EAA-AFB8-0412B8CA4453}" dt="2025-10-07T13:39:58.842" v="31" actId="20577"/>
+          <ac:chgData name="Andrew Turner" userId="9b60647a-c825-4266-aafa-670849c64782" providerId="ADAL" clId="{292526B5-234E-5EAA-AFB8-0412B8CA4453}" dt="2026-10-01T12:42:01.713" v="118" actId="1076"/>
           <ac:spMkLst>
             <pc:docMk/>
-            <pc:sldMk cId="1181395689" sldId="258"/>
-            <ac:spMk id="3" creationId="{B8D7C110-210B-A5C7-C413-7B1DF9CBDC8F}"/>
+            <pc:sldMk cId="2395960425" sldId="262"/>
+            <ac:spMk id="5" creationId="{14F031AE-5EA0-14C1-F2A9-26373DB8EF7F}"/>
+          </ac:spMkLst>
+        </pc:spChg>
+        <pc:picChg chg="mod">
+          <ac:chgData name="Andrew Turner" userId="9b60647a-c825-4266-aafa-670849c64782" providerId="ADAL" clId="{292526B5-234E-5EAA-AFB8-0412B8CA4453}" dt="2026-10-01T12:41:57.362" v="117" actId="1038"/>
+          <ac:picMkLst>
+            <pc:docMk/>
+            <pc:sldMk cId="2395960425" sldId="262"/>
+            <ac:picMk id="4" creationId="{6540C42F-7B5D-161B-0952-869FC555B40C}"/>
+          </ac:picMkLst>
+        </pc:picChg>
+      </pc:sldChg>
+      <pc:sldChg chg="modSp mod">
+        <pc:chgData name="Andrew Turner" userId="9b60647a-c825-4266-aafa-670849c64782" providerId="ADAL" clId="{292526B5-234E-5EAA-AFB8-0412B8CA4453}" dt="2026-10-01T12:42:20.496" v="119" actId="1076"/>
+        <pc:sldMkLst>
+          <pc:docMk/>
+          <pc:sldMk cId="2947382115" sldId="268"/>
+        </pc:sldMkLst>
+        <pc:spChg chg="mod">
+          <ac:chgData name="Andrew Turner" userId="9b60647a-c825-4266-aafa-670849c64782" providerId="ADAL" clId="{292526B5-234E-5EAA-AFB8-0412B8CA4453}" dt="2026-10-01T12:42:20.496" v="119" actId="1076"/>
+          <ac:spMkLst>
+            <pc:docMk/>
+            <pc:sldMk cId="2947382115" sldId="268"/>
+            <ac:spMk id="3" creationId="{184BF083-39D2-7135-C5D3-F549AAD28B7E}"/>
           </ac:spMkLst>
         </pc:spChg>
       </pc:sldChg>
-      <pc:sldChg chg="modSp new mod">
-        <pc:chgData name="Andrew Turner" userId="9b60647a-c825-4266-aafa-670849c64782" providerId="ADAL" clId="{292526B5-234E-5EAA-AFB8-0412B8CA4453}" dt="2025-10-07T13:30:55.560" v="13" actId="5793"/>
-        <pc:sldMkLst>
-          <pc:docMk/>
-          <pc:sldMk cId="365641914" sldId="277"/>
-        </pc:sldMkLst>
-        <pc:spChg chg="mod">
-          <ac:chgData name="Andrew Turner" userId="9b60647a-c825-4266-aafa-670849c64782" providerId="ADAL" clId="{292526B5-234E-5EAA-AFB8-0412B8CA4453}" dt="2025-10-07T13:30:46.461" v="11" actId="20577"/>
-          <ac:spMkLst>
-            <pc:docMk/>
-            <pc:sldMk cId="365641914" sldId="277"/>
-            <ac:spMk id="2" creationId="{B1CB7E89-842F-A54A-963B-EC4202DE627D}"/>
-          </ac:spMkLst>
-        </pc:spChg>
-        <pc:spChg chg="mod">
-          <ac:chgData name="Andrew Turner" userId="9b60647a-c825-4266-aafa-670849c64782" providerId="ADAL" clId="{292526B5-234E-5EAA-AFB8-0412B8CA4453}" dt="2025-10-07T13:30:55.560" v="13" actId="5793"/>
-          <ac:spMkLst>
-            <pc:docMk/>
-            <pc:sldMk cId="365641914" sldId="277"/>
-            <ac:spMk id="3" creationId="{61158D2E-F2DD-4FEB-1772-E71323CC22EC}"/>
-          </ac:spMkLst>
-        </pc:spChg>
-      </pc:sldChg>
-      <pc:sldChg chg="modSp new mod">
-        <pc:chgData name="Andrew Turner" userId="9b60647a-c825-4266-aafa-670849c64782" providerId="ADAL" clId="{292526B5-234E-5EAA-AFB8-0412B8CA4453}" dt="2025-10-07T13:39:33.429" v="27" actId="20577"/>
-        <pc:sldMkLst>
-          <pc:docMk/>
-          <pc:sldMk cId="3480535562" sldId="278"/>
-        </pc:sldMkLst>
-        <pc:spChg chg="mod">
-          <ac:chgData name="Andrew Turner" userId="9b60647a-c825-4266-aafa-670849c64782" providerId="ADAL" clId="{292526B5-234E-5EAA-AFB8-0412B8CA4453}" dt="2025-10-07T13:39:22.879" v="24" actId="20577"/>
-          <ac:spMkLst>
-            <pc:docMk/>
-            <pc:sldMk cId="3480535562" sldId="278"/>
-            <ac:spMk id="2" creationId="{C06E3AB7-BC03-2531-F63B-80A14B3B67BE}"/>
-          </ac:spMkLst>
-        </pc:spChg>
-        <pc:spChg chg="mod">
-          <ac:chgData name="Andrew Turner" userId="9b60647a-c825-4266-aafa-670849c64782" providerId="ADAL" clId="{292526B5-234E-5EAA-AFB8-0412B8CA4453}" dt="2025-10-07T13:39:33.429" v="27" actId="20577"/>
-          <ac:spMkLst>
-            <pc:docMk/>
-            <pc:sldMk cId="3480535562" sldId="278"/>
-            <ac:spMk id="3" creationId="{B8EF3A5A-7398-C020-161F-ECB9A34FAF49}"/>
-          </ac:spMkLst>
-        </pc:spChg>
-      </pc:sldChg>
-      <pc:sldMasterChg chg="setBg modSldLayout">
-        <pc:chgData name="Andrew Turner" userId="9b60647a-c825-4266-aafa-670849c64782" providerId="ADAL" clId="{292526B5-234E-5EAA-AFB8-0412B8CA4453}" dt="2025-10-07T13:29:39.200" v="1"/>
-        <pc:sldMasterMkLst>
-          <pc:docMk/>
-          <pc:sldMasterMk cId="2084719545" sldId="2147483648"/>
-        </pc:sldMasterMkLst>
-        <pc:sldLayoutChg chg="setBg">
-          <pc:chgData name="Andrew Turner" userId="9b60647a-c825-4266-aafa-670849c64782" providerId="ADAL" clId="{292526B5-234E-5EAA-AFB8-0412B8CA4453}" dt="2025-10-07T13:29:39.200" v="1"/>
-          <pc:sldLayoutMkLst>
-            <pc:docMk/>
-            <pc:sldMasterMk cId="2084719545" sldId="2147483648"/>
-            <pc:sldLayoutMk cId="785453709" sldId="2147483649"/>
-          </pc:sldLayoutMkLst>
-        </pc:sldLayoutChg>
-        <pc:sldLayoutChg chg="setBg">
-          <pc:chgData name="Andrew Turner" userId="9b60647a-c825-4266-aafa-670849c64782" providerId="ADAL" clId="{292526B5-234E-5EAA-AFB8-0412B8CA4453}" dt="2025-10-07T13:29:39.200" v="1"/>
-          <pc:sldLayoutMkLst>
-            <pc:docMk/>
-            <pc:sldMasterMk cId="2084719545" sldId="2147483648"/>
-            <pc:sldLayoutMk cId="1212314499" sldId="2147483650"/>
-          </pc:sldLayoutMkLst>
-        </pc:sldLayoutChg>
-        <pc:sldLayoutChg chg="setBg">
-          <pc:chgData name="Andrew Turner" userId="9b60647a-c825-4266-aafa-670849c64782" providerId="ADAL" clId="{292526B5-234E-5EAA-AFB8-0412B8CA4453}" dt="2025-10-07T13:29:39.200" v="1"/>
-          <pc:sldLayoutMkLst>
-            <pc:docMk/>
-            <pc:sldMasterMk cId="2084719545" sldId="2147483648"/>
-            <pc:sldLayoutMk cId="807772394" sldId="2147483651"/>
-          </pc:sldLayoutMkLst>
-        </pc:sldLayoutChg>
-        <pc:sldLayoutChg chg="setBg">
-          <pc:chgData name="Andrew Turner" userId="9b60647a-c825-4266-aafa-670849c64782" providerId="ADAL" clId="{292526B5-234E-5EAA-AFB8-0412B8CA4453}" dt="2025-10-07T13:29:39.200" v="1"/>
-          <pc:sldLayoutMkLst>
-            <pc:docMk/>
-            <pc:sldMasterMk cId="2084719545" sldId="2147483648"/>
-            <pc:sldLayoutMk cId="1711621900" sldId="2147483652"/>
-          </pc:sldLayoutMkLst>
-        </pc:sldLayoutChg>
-        <pc:sldLayoutChg chg="setBg">
-          <pc:chgData name="Andrew Turner" userId="9b60647a-c825-4266-aafa-670849c64782" providerId="ADAL" clId="{292526B5-234E-5EAA-AFB8-0412B8CA4453}" dt="2025-10-07T13:29:39.200" v="1"/>
-          <pc:sldLayoutMkLst>
-            <pc:docMk/>
-            <pc:sldMasterMk cId="2084719545" sldId="2147483648"/>
-            <pc:sldLayoutMk cId="171337435" sldId="2147483653"/>
-          </pc:sldLayoutMkLst>
-        </pc:sldLayoutChg>
-        <pc:sldLayoutChg chg="setBg">
-          <pc:chgData name="Andrew Turner" userId="9b60647a-c825-4266-aafa-670849c64782" providerId="ADAL" clId="{292526B5-234E-5EAA-AFB8-0412B8CA4453}" dt="2025-10-07T13:29:39.200" v="1"/>
-          <pc:sldLayoutMkLst>
-            <pc:docMk/>
-            <pc:sldMasterMk cId="2084719545" sldId="2147483648"/>
-            <pc:sldLayoutMk cId="1996026068" sldId="2147483654"/>
-          </pc:sldLayoutMkLst>
-        </pc:sldLayoutChg>
-        <pc:sldLayoutChg chg="setBg">
-          <pc:chgData name="Andrew Turner" userId="9b60647a-c825-4266-aafa-670849c64782" providerId="ADAL" clId="{292526B5-234E-5EAA-AFB8-0412B8CA4453}" dt="2025-10-07T13:29:39.200" v="1"/>
-          <pc:sldLayoutMkLst>
-            <pc:docMk/>
-            <pc:sldMasterMk cId="2084719545" sldId="2147483648"/>
-            <pc:sldLayoutMk cId="3964091850" sldId="2147483655"/>
-          </pc:sldLayoutMkLst>
-        </pc:sldLayoutChg>
-        <pc:sldLayoutChg chg="setBg">
-          <pc:chgData name="Andrew Turner" userId="9b60647a-c825-4266-aafa-670849c64782" providerId="ADAL" clId="{292526B5-234E-5EAA-AFB8-0412B8CA4453}" dt="2025-10-07T13:29:39.200" v="1"/>
-          <pc:sldLayoutMkLst>
-            <pc:docMk/>
-            <pc:sldMasterMk cId="2084719545" sldId="2147483648"/>
-            <pc:sldLayoutMk cId="2354250369" sldId="2147483656"/>
-          </pc:sldLayoutMkLst>
-        </pc:sldLayoutChg>
-        <pc:sldLayoutChg chg="setBg">
-          <pc:chgData name="Andrew Turner" userId="9b60647a-c825-4266-aafa-670849c64782" providerId="ADAL" clId="{292526B5-234E-5EAA-AFB8-0412B8CA4453}" dt="2025-10-07T13:29:39.200" v="1"/>
-          <pc:sldLayoutMkLst>
-            <pc:docMk/>
-            <pc:sldMasterMk cId="2084719545" sldId="2147483648"/>
-            <pc:sldLayoutMk cId="1651215456" sldId="2147483657"/>
-          </pc:sldLayoutMkLst>
-        </pc:sldLayoutChg>
-        <pc:sldLayoutChg chg="setBg">
-          <pc:chgData name="Andrew Turner" userId="9b60647a-c825-4266-aafa-670849c64782" providerId="ADAL" clId="{292526B5-234E-5EAA-AFB8-0412B8CA4453}" dt="2025-10-07T13:29:39.200" v="1"/>
-          <pc:sldLayoutMkLst>
-            <pc:docMk/>
-            <pc:sldMasterMk cId="2084719545" sldId="2147483648"/>
-            <pc:sldLayoutMk cId="1168730819" sldId="2147483658"/>
-          </pc:sldLayoutMkLst>
-        </pc:sldLayoutChg>
-        <pc:sldLayoutChg chg="setBg">
-          <pc:chgData name="Andrew Turner" userId="9b60647a-c825-4266-aafa-670849c64782" providerId="ADAL" clId="{292526B5-234E-5EAA-AFB8-0412B8CA4453}" dt="2025-10-07T13:29:39.200" v="1"/>
-          <pc:sldLayoutMkLst>
-            <pc:docMk/>
-            <pc:sldMasterMk cId="2084719545" sldId="2147483648"/>
-            <pc:sldLayoutMk cId="1304486253" sldId="2147483659"/>
-          </pc:sldLayoutMkLst>
-        </pc:sldLayoutChg>
-      </pc:sldMasterChg>
     </pc:docChg>
   </pc:docChgLst>
 </pc:chgInfo>
@@ -404,7 +310,7 @@
           <a:p>
             <a:fld id="{17F04524-679D-D640-953F-C37E643109F2}" type="datetimeFigureOut">
               <a:rPr lang="en-GB" smtClean="0"/>
-              <a:t>07/10/2025</a:t>
+              <a:t>02/10/2026</a:t>
             </a:fld>
             <a:endParaRPr lang="en-GB"/>
           </a:p>
@@ -1007,7 +913,7 @@
           <a:p>
             <a:fld id="{672813EE-9A87-8947-B3D8-63B457B8D0DE}" type="datetimeFigureOut">
               <a:rPr lang="en-GB" smtClean="0"/>
-              <a:t>07/10/2025</a:t>
+              <a:t>02/10/2026</a:t>
             </a:fld>
             <a:endParaRPr lang="en-GB"/>
           </a:p>
@@ -1205,7 +1111,7 @@
           <a:p>
             <a:fld id="{672813EE-9A87-8947-B3D8-63B457B8D0DE}" type="datetimeFigureOut">
               <a:rPr lang="en-GB" smtClean="0"/>
-              <a:t>07/10/2025</a:t>
+              <a:t>02/10/2026</a:t>
             </a:fld>
             <a:endParaRPr lang="en-GB"/>
           </a:p>
@@ -1413,7 +1319,7 @@
           <a:p>
             <a:fld id="{672813EE-9A87-8947-B3D8-63B457B8D0DE}" type="datetimeFigureOut">
               <a:rPr lang="en-GB" smtClean="0"/>
-              <a:t>07/10/2025</a:t>
+              <a:t>02/10/2026</a:t>
             </a:fld>
             <a:endParaRPr lang="en-GB"/>
           </a:p>
@@ -1611,7 +1517,7 @@
           <a:p>
             <a:fld id="{672813EE-9A87-8947-B3D8-63B457B8D0DE}" type="datetimeFigureOut">
               <a:rPr lang="en-GB" smtClean="0"/>
-              <a:t>07/10/2025</a:t>
+              <a:t>02/10/2026</a:t>
             </a:fld>
             <a:endParaRPr lang="en-GB"/>
           </a:p>
@@ -1886,7 +1792,7 @@
           <a:p>
             <a:fld id="{672813EE-9A87-8947-B3D8-63B457B8D0DE}" type="datetimeFigureOut">
               <a:rPr lang="en-GB" smtClean="0"/>
-              <a:t>07/10/2025</a:t>
+              <a:t>02/10/2026</a:t>
             </a:fld>
             <a:endParaRPr lang="en-GB"/>
           </a:p>
@@ -2151,7 +2057,7 @@
           <a:p>
             <a:fld id="{672813EE-9A87-8947-B3D8-63B457B8D0DE}" type="datetimeFigureOut">
               <a:rPr lang="en-GB" smtClean="0"/>
-              <a:t>07/10/2025</a:t>
+              <a:t>02/10/2026</a:t>
             </a:fld>
             <a:endParaRPr lang="en-GB"/>
           </a:p>
@@ -2563,7 +2469,7 @@
           <a:p>
             <a:fld id="{672813EE-9A87-8947-B3D8-63B457B8D0DE}" type="datetimeFigureOut">
               <a:rPr lang="en-GB" smtClean="0"/>
-              <a:t>07/10/2025</a:t>
+              <a:t>02/10/2026</a:t>
             </a:fld>
             <a:endParaRPr lang="en-GB"/>
           </a:p>
@@ -2704,7 +2610,7 @@
           <a:p>
             <a:fld id="{672813EE-9A87-8947-B3D8-63B457B8D0DE}" type="datetimeFigureOut">
               <a:rPr lang="en-GB" smtClean="0"/>
-              <a:t>07/10/2025</a:t>
+              <a:t>02/10/2026</a:t>
             </a:fld>
             <a:endParaRPr lang="en-GB"/>
           </a:p>
@@ -2817,7 +2723,7 @@
           <a:p>
             <a:fld id="{672813EE-9A87-8947-B3D8-63B457B8D0DE}" type="datetimeFigureOut">
               <a:rPr lang="en-GB" smtClean="0"/>
-              <a:t>07/10/2025</a:t>
+              <a:t>02/10/2026</a:t>
             </a:fld>
             <a:endParaRPr lang="en-GB"/>
           </a:p>
@@ -3128,7 +3034,7 @@
           <a:p>
             <a:fld id="{672813EE-9A87-8947-B3D8-63B457B8D0DE}" type="datetimeFigureOut">
               <a:rPr lang="en-GB" smtClean="0"/>
-              <a:t>07/10/2025</a:t>
+              <a:t>02/10/2026</a:t>
             </a:fld>
             <a:endParaRPr lang="en-GB"/>
           </a:p>
@@ -3416,7 +3322,7 @@
           <a:p>
             <a:fld id="{672813EE-9A87-8947-B3D8-63B457B8D0DE}" type="datetimeFigureOut">
               <a:rPr lang="en-GB" smtClean="0"/>
-              <a:t>07/10/2025</a:t>
+              <a:t>02/10/2026</a:t>
             </a:fld>
             <a:endParaRPr lang="en-GB"/>
           </a:p>
@@ -3660,7 +3566,7 @@
           <a:p>
             <a:fld id="{672813EE-9A87-8947-B3D8-63B457B8D0DE}" type="datetimeFigureOut">
               <a:rPr lang="en-GB" smtClean="0"/>
-              <a:t>07/10/2025</a:t>
+              <a:t>02/10/2026</a:t>
             </a:fld>
             <a:endParaRPr lang="en-GB"/>
           </a:p>
@@ -5423,7 +5329,7 @@
         </p:nvSpPr>
         <p:spPr>
           <a:xfrm>
-            <a:off x="838200" y="1825625"/>
+            <a:off x="388345" y="1715372"/>
             <a:ext cx="4097357" cy="4351338"/>
           </a:xfrm>
         </p:spPr>
@@ -8144,14 +8050,14 @@
             <p:ph idx="1"/>
             <p:extLst>
               <p:ext uri="{D42A27DB-BD31-4B8C-83A1-F6EECF244321}">
-                <p14:modId xmlns:p14="http://schemas.microsoft.com/office/powerpoint/2010/main" val="882611738"/>
+                <p14:modId xmlns:p14="http://schemas.microsoft.com/office/powerpoint/2010/main" val="2496251354"/>
               </p:ext>
             </p:extLst>
           </p:nvPr>
         </p:nvGraphicFramePr>
         <p:xfrm>
-          <a:off x="978583" y="2544725"/>
-          <a:ext cx="5411200" cy="2926080"/>
+          <a:off x="374914" y="2531319"/>
+          <a:ext cx="4636112" cy="3200400"/>
         </p:xfrm>
         <a:graphic>
           <a:graphicData uri="http://schemas.openxmlformats.org/drawingml/2006/table">
@@ -8160,14 +8066,14 @@
                 <a:tableStyleId>{793D81CF-94F2-401A-BA57-92F5A7B2D0C5}</a:tableStyleId>
               </a:tblPr>
               <a:tblGrid>
-                <a:gridCol w="1581002">
+                <a:gridCol w="1354543">
                   <a:extLst>
                     <a:ext uri="{9D8B030D-6E8A-4147-A177-3AD203B41FA5}">
                       <a16:colId xmlns:a16="http://schemas.microsoft.com/office/drawing/2014/main" val="3717813174"/>
                     </a:ext>
                   </a:extLst>
                 </a:gridCol>
-                <a:gridCol w="3830198">
+                <a:gridCol w="3281569">
                   <a:extLst>
                     <a:ext uri="{9D8B030D-6E8A-4147-A177-3AD203B41FA5}">
                       <a16:colId xmlns:a16="http://schemas.microsoft.com/office/drawing/2014/main" val="3984777107"/>
@@ -8212,7 +8118,7 @@
                           </a:solidFill>
                           <a:effectLst/>
                         </a:rPr>
-                        <a:t>Carbon Intensity (gCO</a:t>
+                        <a:t>2025 Carbon Intensity (gCO</a:t>
                       </a:r>
                       <a:r>
                         <a:rPr lang="en-GB" b="1" baseline="-25000" dirty="0">
@@ -8279,7 +8185,7 @@
                           </a:solidFill>
                           <a:effectLst/>
                         </a:rPr>
-                        <a:t>56</a:t>
+                        <a:t>41</a:t>
                       </a:r>
                     </a:p>
                   </a:txBody>
@@ -8322,13 +8228,13 @@
                         <a:buNone/>
                       </a:pPr>
                       <a:r>
-                        <a:rPr lang="en-GB">
+                        <a:rPr lang="en-GB" dirty="0">
                           <a:solidFill>
                             <a:srgbClr val="000000"/>
                           </a:solidFill>
                           <a:effectLst/>
                         </a:rPr>
-                        <a:t>238</a:t>
+                        <a:t>217</a:t>
                       </a:r>
                     </a:p>
                   </a:txBody>
@@ -8371,13 +8277,13 @@
                         <a:buNone/>
                       </a:pPr>
                       <a:r>
-                        <a:rPr lang="en-GB">
+                        <a:rPr lang="en-GB" dirty="0">
                           <a:solidFill>
                             <a:srgbClr val="000000"/>
                           </a:solidFill>
                           <a:effectLst/>
                         </a:rPr>
-                        <a:t>369</a:t>
+                        <a:t>384</a:t>
                       </a:r>
                     </a:p>
                   </a:txBody>
@@ -8420,13 +8326,13 @@
                         <a:buNone/>
                       </a:pPr>
                       <a:r>
-                        <a:rPr lang="en-GB">
+                        <a:rPr lang="en-GB" dirty="0">
                           <a:solidFill>
                             <a:srgbClr val="000000"/>
                           </a:solidFill>
                           <a:effectLst/>
                         </a:rPr>
-                        <a:t>381</a:t>
+                        <a:t>330</a:t>
                       </a:r>
                     </a:p>
                   </a:txBody>
@@ -8469,13 +8375,13 @@
                         <a:buNone/>
                       </a:pPr>
                       <a:r>
-                        <a:rPr lang="en-GB">
+                        <a:rPr lang="en-GB" dirty="0">
                           <a:solidFill>
                             <a:srgbClr val="000000"/>
                           </a:solidFill>
                           <a:effectLst/>
                         </a:rPr>
-                        <a:t>441</a:t>
+                        <a:t>450</a:t>
                       </a:r>
                     </a:p>
                   </a:txBody>
@@ -8518,13 +8424,13 @@
                         <a:buNone/>
                       </a:pPr>
                       <a:r>
-                        <a:rPr lang="en-GB">
+                        <a:rPr lang="en-GB" dirty="0">
                           <a:solidFill>
                             <a:srgbClr val="000000"/>
                           </a:solidFill>
                           <a:effectLst/>
                         </a:rPr>
-                        <a:t>485</a:t>
+                        <a:t>477</a:t>
                       </a:r>
                     </a:p>
                   </a:txBody>
@@ -8573,7 +8479,7 @@
                           </a:solidFill>
                           <a:effectLst/>
                         </a:rPr>
-                        <a:t>549</a:t>
+                        <a:t>525</a:t>
                       </a:r>
                     </a:p>
                   </a:txBody>
@@ -8709,7 +8615,7 @@
         </p:nvSpPr>
         <p:spPr>
           <a:xfrm>
-            <a:off x="838199" y="1786565"/>
+            <a:off x="838200" y="1449973"/>
             <a:ext cx="9616807" cy="369332"/>
           </a:xfrm>
           <a:prstGeom prst="rect">
@@ -8740,7 +8646,26 @@
                 <a:effectLst/>
                 <a:latin typeface="Mulish"/>
               </a:rPr>
-              <a:t>his table compares values across the world in 2023 (ref: </a:t>
+              <a:t>his </a:t>
+            </a:r>
+            <a:r>
+              <a:rPr lang="en-GB" dirty="0">
+                <a:solidFill>
+                  <a:srgbClr val="383838"/>
+                </a:solidFill>
+                <a:latin typeface="Mulish"/>
+              </a:rPr>
+              <a:t>data</a:t>
+            </a:r>
+            <a:r>
+              <a:rPr lang="en-GB" b="0" i="0" dirty="0">
+                <a:solidFill>
+                  <a:srgbClr val="383838"/>
+                </a:solidFill>
+                <a:effectLst/>
+                <a:latin typeface="Mulish"/>
+              </a:rPr>
+              <a:t> compares values across the world  (ref: </a:t>
             </a:r>
             <a:r>
               <a:rPr lang="en-GB" b="0" i="0" u="none" strike="noStrike" dirty="0">
@@ -8767,6 +8692,37 @@
           </a:p>
         </p:txBody>
       </p:sp>
+      <p:pic>
+        <p:nvPicPr>
+          <p:cNvPr id="6" name="Picture 5">
+            <a:extLst>
+              <a:ext uri="{FF2B5EF4-FFF2-40B4-BE49-F238E27FC236}">
+                <a16:creationId xmlns:a16="http://schemas.microsoft.com/office/drawing/2014/main" id="{A35B8E94-18B7-DFEF-3068-6C2E2B0229DD}"/>
+              </a:ext>
+            </a:extLst>
+          </p:cNvPr>
+          <p:cNvPicPr>
+            <a:picLocks noChangeAspect="1"/>
+          </p:cNvPicPr>
+          <p:nvPr/>
+        </p:nvPicPr>
+        <p:blipFill>
+          <a:blip r:embed="rId3"/>
+          <a:srcRect t="519" b="32295"/>
+          <a:stretch>
+            <a:fillRect/>
+          </a:stretch>
+        </p:blipFill>
+        <p:spPr>
+          <a:xfrm>
+            <a:off x="5192881" y="1884875"/>
+            <a:ext cx="6624205" cy="4608000"/>
+          </a:xfrm>
+          <a:prstGeom prst="rect">
+            <a:avLst/>
+          </a:prstGeom>
+        </p:spPr>
+      </p:pic>
     </p:spTree>
     <p:extLst>
       <p:ext uri="{BB962C8B-B14F-4D97-AF65-F5344CB8AC3E}">
@@ -8847,7 +8803,7 @@
         </p:blipFill>
         <p:spPr>
           <a:xfrm>
-            <a:off x="3620090" y="1690688"/>
+            <a:off x="4031570" y="1690688"/>
             <a:ext cx="7772400" cy="4373745"/>
           </a:xfrm>
           <a:prstGeom prst="rect">
@@ -8869,7 +8825,7 @@
         </p:nvSpPr>
         <p:spPr>
           <a:xfrm>
-            <a:off x="799510" y="2456063"/>
+            <a:off x="388030" y="2524643"/>
             <a:ext cx="3512458" cy="2246769"/>
           </a:xfrm>
           <a:prstGeom prst="rect">
